--- a/KAILA_Founder_Grade_Package/KAILA Founder Presentation/presentation/KAILA_Investor_Pitch_Deck.pptx
+++ b/KAILA_Founder_Grade_Package/KAILA Founder Presentation/presentation/KAILA_Investor_Pitch_Deck.pptx
@@ -3188,33 +3188,9 @@
           </a:p>
         </p:txBody>
       </p:sp>
-      <p:pic>
-        <p:nvPicPr>
-          <p:cNvPr id="4" name="Picture 3" descr="android-chrome-512x512.png"/>
-          <p:cNvPicPr>
-            <a:picLocks noChangeAspect="1"/>
-          </p:cNvPicPr>
-          <p:nvPr/>
-        </p:nvPicPr>
-        <p:blipFill>
-          <a:blip r:embed="rId2"/>
-          <a:stretch>
-            <a:fillRect/>
-          </a:stretch>
-        </p:blipFill>
-        <p:spPr>
-          <a:xfrm>
-            <a:off x="8732520" y="777240"/>
-            <a:ext cx="2011680" cy="2011680"/>
-          </a:xfrm>
-          <a:prstGeom prst="rect">
-            <a:avLst/>
-          </a:prstGeom>
-        </p:spPr>
-      </p:pic>
-      <p:sp>
-        <p:nvSpPr>
-          <p:cNvPr id="5" name="TextBox 4"/>
+      <p:sp>
+        <p:nvSpPr>
+          <p:cNvPr id="4" name="TextBox 3"/>
           <p:cNvSpPr txBox="1"/>
           <p:nvPr/>
         </p:nvSpPr>
@@ -3248,7 +3224,7 @@
       </p:sp>
       <p:sp>
         <p:nvSpPr>
-          <p:cNvPr id="6" name="TextBox 5"/>
+          <p:cNvPr id="5" name="TextBox 4"/>
           <p:cNvSpPr txBox="1"/>
           <p:nvPr/>
         </p:nvSpPr>
@@ -3282,7 +3258,7 @@
       </p:sp>
       <p:sp>
         <p:nvSpPr>
-          <p:cNvPr id="7" name="TextBox 6"/>
+          <p:cNvPr id="6" name="TextBox 5"/>
           <p:cNvSpPr txBox="1"/>
           <p:nvPr/>
         </p:nvSpPr>
@@ -3316,7 +3292,7 @@
       </p:sp>
       <p:sp>
         <p:nvSpPr>
-          <p:cNvPr id="8" name="TextBox 7"/>
+          <p:cNvPr id="7" name="TextBox 6"/>
           <p:cNvSpPr txBox="1"/>
           <p:nvPr/>
         </p:nvSpPr>
@@ -3350,7 +3326,7 @@
       </p:sp>
       <p:sp>
         <p:nvSpPr>
-          <p:cNvPr id="9" name="TextBox 8"/>
+          <p:cNvPr id="8" name="TextBox 7"/>
           <p:cNvSpPr txBox="1"/>
           <p:nvPr/>
         </p:nvSpPr>
@@ -3384,7 +3360,7 @@
       </p:sp>
       <p:sp>
         <p:nvSpPr>
-          <p:cNvPr id="10" name="TextBox 9"/>
+          <p:cNvPr id="9" name="TextBox 8"/>
           <p:cNvSpPr txBox="1"/>
           <p:nvPr/>
         </p:nvSpPr>
@@ -3418,7 +3394,7 @@
       </p:sp>
       <p:sp>
         <p:nvSpPr>
-          <p:cNvPr id="11" name="TextBox 10"/>
+          <p:cNvPr id="10" name="TextBox 9"/>
           <p:cNvSpPr txBox="1"/>
           <p:nvPr/>
         </p:nvSpPr>
@@ -3452,7 +3428,7 @@
       </p:sp>
       <p:sp>
         <p:nvSpPr>
-          <p:cNvPr id="12" name="TextBox 11"/>
+          <p:cNvPr id="11" name="TextBox 10"/>
           <p:cNvSpPr txBox="1"/>
           <p:nvPr/>
         </p:nvSpPr>
@@ -3763,7 +3739,7 @@
                 </a:solidFill>
                 <a:latin typeface="Arial"/>
               </a:rPr>
-              <a:t>Current stage: founder-grade package, prototype mockups, and Gingoog validation plan.</a:t>
+              <a:t>Current stage: founder-grade package, browser MVP, native wrapper, and Gingoog validation plan.</a:t>
             </a:r>
           </a:p>
         </p:txBody>
@@ -4294,7 +4270,7 @@
                 </a:solidFill>
                 <a:latin typeface="Arial"/>
               </a:rPr>
-              <a:t>5-8</a:t>
+              <a:t>9</a:t>
             </a:r>
           </a:p>
         </p:txBody>
@@ -4328,7 +4304,7 @@
                 </a:solidFill>
                 <a:latin typeface="Arial"/>
               </a:rPr>
-              <a:t>Starting service categories</a:t>
+              <a:t>Starting service categories incl. cellphone repair</a:t>
             </a:r>
           </a:p>
         </p:txBody>
@@ -4759,7 +4735,7 @@
                 </a:solidFill>
                 <a:latin typeface="Arial"/>
               </a:rPr>
-              <a:t>3-year model: realistic ramp from concierge pilot to paid marketplace.</a:t>
+              <a:t>Lean 3-year model: founder-led pilot before paid marketplace.</a:t>
             </a:r>
           </a:p>
         </p:txBody>
@@ -6497,7 +6473,7 @@
                 </a:solidFill>
                 <a:latin typeface="Arial"/>
               </a:rPr>
-              <a:t>PHP 1.8M</a:t>
+              <a:t>PHP 0.3M</a:t>
             </a:r>
           </a:p>
         </p:txBody>
@@ -6576,7 +6552,7 @@
                 </a:solidFill>
                 <a:latin typeface="Arial"/>
               </a:rPr>
-              <a:t>PHP 3.6M</a:t>
+              <a:t>PHP 0.9M</a:t>
             </a:r>
           </a:p>
         </p:txBody>
@@ -6655,7 +6631,7 @@
                 </a:solidFill>
                 <a:latin typeface="Arial"/>
               </a:rPr>
-              <a:t>PHP 7.2M</a:t>
+              <a:t>PHP 1.8M</a:t>
             </a:r>
           </a:p>
         </p:txBody>
@@ -6813,7 +6789,7 @@
                 </a:solidFill>
                 <a:latin typeface="Arial"/>
               </a:rPr>
-              <a:t>(PHP 1.6M)</a:t>
+              <a:t>(PHP 0.1M)</a:t>
             </a:r>
           </a:p>
         </p:txBody>
@@ -6892,7 +6868,7 @@
                 </a:solidFill>
                 <a:latin typeface="Arial"/>
               </a:rPr>
-              <a:t>(PHP 1.9M)</a:t>
+              <a:t>PHP 0.8M</a:t>
             </a:r>
           </a:p>
         </p:txBody>
@@ -6971,7 +6947,7 @@
                 </a:solidFill>
                 <a:latin typeface="Arial"/>
               </a:rPr>
-              <a:t>PHP 0.1M</a:t>
+              <a:t>PHP 5.5M</a:t>
             </a:r>
           </a:p>
         </p:txBody>
@@ -7289,7 +7265,7 @@
                 </a:solidFill>
                 <a:latin typeface="Arial"/>
               </a:rPr>
-              <a:t>Raising PHP 2,000,000 to validate Gingoog City and build the first focused MVP.</a:t>
+              <a:t>Seeking lean pilot support after building the first browser MVP and native wrapper.</a:t>
             </a:r>
           </a:p>
         </p:txBody>
@@ -7368,7 +7344,7 @@
                 </a:solidFill>
                 <a:latin typeface="Arial"/>
               </a:rPr>
-              <a:t>40%</a:t>
+              <a:t>20%</a:t>
             </a:r>
           </a:p>
         </p:txBody>
@@ -7402,7 +7378,7 @@
                 </a:solidFill>
                 <a:latin typeface="Arial"/>
               </a:rPr>
-              <a:t>Development</a:t>
+              <a:t>MVP polish</a:t>
             </a:r>
           </a:p>
         </p:txBody>
@@ -7436,7 +7412,7 @@
                 </a:solidFill>
                 <a:latin typeface="Arial"/>
               </a:rPr>
-              <a:t>PHP 800,000</a:t>
+              <a:t>PHP 100,000</a:t>
             </a:r>
           </a:p>
         </p:txBody>
@@ -7549,7 +7525,7 @@
                 </a:solidFill>
                 <a:latin typeface="Arial"/>
               </a:rPr>
-              <a:t>Marketing</a:t>
+              <a:t>Local marketing</a:t>
             </a:r>
           </a:p>
         </p:txBody>
@@ -7583,7 +7559,7 @@
                 </a:solidFill>
                 <a:latin typeface="Arial"/>
               </a:rPr>
-              <a:t>PHP 700,000</a:t>
+              <a:t>PHP 175,000</a:t>
             </a:r>
           </a:p>
         </p:txBody>
@@ -7662,7 +7638,7 @@
                 </a:solidFill>
                 <a:latin typeface="Arial"/>
               </a:rPr>
-              <a:t>15%</a:t>
+              <a:t>30%</a:t>
             </a:r>
           </a:p>
         </p:txBody>
@@ -7730,7 +7706,7 @@
                 </a:solidFill>
                 <a:latin typeface="Arial"/>
               </a:rPr>
-              <a:t>PHP 300,000</a:t>
+              <a:t>PHP 150,000</a:t>
             </a:r>
           </a:p>
         </p:txBody>
@@ -7809,7 +7785,7 @@
                 </a:solidFill>
                 <a:latin typeface="Arial"/>
               </a:rPr>
-              <a:t>10%</a:t>
+              <a:t>15%</a:t>
             </a:r>
           </a:p>
         </p:txBody>
@@ -7877,7 +7853,7 @@
                 </a:solidFill>
                 <a:latin typeface="Arial"/>
               </a:rPr>
-              <a:t>PHP 200,000</a:t>
+              <a:t>PHP 75,000</a:t>
             </a:r>
           </a:p>
         </p:txBody>
@@ -7911,7 +7887,7 @@
                 </a:solidFill>
                 <a:latin typeface="Arial"/>
               </a:rPr>
-              <a:t>Scenario options in the package show lean, base, and accelerated funding paths.</a:t>
+              <a:t>Use free resources first; paid spend should support only field validation, page growth, support, and essential app polish.</a:t>
             </a:r>
           </a:p>
         </p:txBody>
@@ -8907,7 +8883,7 @@
               </a:defRPr>
             </a:pPr>
             <a:r>
-              <a:t>Build the MVP around the proven workflow.</a:t>
+              <a:t>Improve the MVP around the proven workflow.</a:t>
             </a:r>
           </a:p>
           <a:p>
@@ -12656,38 +12632,14 @@
                 </a:solidFill>
                 <a:latin typeface="Arial"/>
               </a:rPr>
-              <a:t>Early mockups show the core marketplace workflow before full app build.</a:t>
-            </a:r>
-          </a:p>
-        </p:txBody>
-      </p:sp>
-      <p:pic>
-        <p:nvPicPr>
-          <p:cNvPr id="9" name="Picture 8" descr="kaila-preview.png"/>
-          <p:cNvPicPr>
-            <a:picLocks noChangeAspect="1"/>
-          </p:cNvPicPr>
-          <p:nvPr/>
-        </p:nvPicPr>
-        <p:blipFill>
-          <a:blip r:embed="rId2"/>
-          <a:stretch>
-            <a:fillRect/>
-          </a:stretch>
-        </p:blipFill>
-        <p:spPr>
-          <a:xfrm>
-            <a:off x="777240" y="1828800"/>
-            <a:ext cx="5715000" cy="3619500"/>
-          </a:xfrm>
-          <a:prstGeom prst="rect">
-            <a:avLst/>
-          </a:prstGeom>
-        </p:spPr>
-      </p:pic>
-      <p:sp>
-        <p:nvSpPr>
-          <p:cNvPr id="10" name="Rounded Rectangle 9"/>
+              <a:t>The browser MVP and native wrapper now show the core marketplace workflow.</a:t>
+            </a:r>
+          </a:p>
+        </p:txBody>
+      </p:sp>
+      <p:sp>
+        <p:nvSpPr>
+          <p:cNvPr id="9" name="Rounded Rectangle 8"/>
           <p:cNvSpPr/>
           <p:nvPr/>
         </p:nvSpPr>
@@ -12732,7 +12684,7 @@
       </p:sp>
       <p:sp>
         <p:nvSpPr>
-          <p:cNvPr id="11" name="TextBox 10"/>
+          <p:cNvPr id="10" name="TextBox 9"/>
           <p:cNvSpPr txBox="1"/>
           <p:nvPr/>
         </p:nvSpPr>
@@ -12812,7 +12764,7 @@
               </a:defRPr>
             </a:pPr>
             <a:r>
-              <a:t>Mobile-first experience planned for clients and providers</a:t>
+              <a:t>Browser PWA and native Android wrapper available for pilot testing</a:t>
             </a:r>
           </a:p>
         </p:txBody>
@@ -18051,7 +18003,7 @@
               <a:t>Recruit providers first
 Run concierge matching
 Measure response and completion
-Convert proof into MVP scope</a:t>
+Convert proof into MVP improvements</a:t>
             </a:r>
           </a:p>
         </p:txBody>

--- a/KAILA_Founder_Grade_Package/KAILA Founder Presentation/presentation/KAILA_Investor_Pitch_Deck.pptx
+++ b/KAILA_Founder_Grade_Package/KAILA Founder Presentation/presentation/KAILA_Investor_Pitch_Deck.pptx
@@ -4735,7 +4735,7 @@
                 </a:solidFill>
                 <a:latin typeface="Arial"/>
               </a:rPr>
-              <a:t>Lean 3-year model: founder-led pilot before paid marketplace.</a:t>
+              <a:t>Lean 3-year model: micro-budget pilot before paid marketplace.</a:t>
             </a:r>
           </a:p>
         </p:txBody>
@@ -6473,7 +6473,7 @@
                 </a:solidFill>
                 <a:latin typeface="Arial"/>
               </a:rPr>
-              <a:t>PHP 0.3M</a:t>
+              <a:t>PHP 36K</a:t>
             </a:r>
           </a:p>
         </p:txBody>
@@ -6552,7 +6552,7 @@
                 </a:solidFill>
                 <a:latin typeface="Arial"/>
               </a:rPr>
-              <a:t>PHP 0.9M</a:t>
+              <a:t>PHP 60K</a:t>
             </a:r>
           </a:p>
         </p:txBody>
@@ -6631,7 +6631,7 @@
                 </a:solidFill>
                 <a:latin typeface="Arial"/>
               </a:rPr>
-              <a:t>PHP 1.8M</a:t>
+              <a:t>PHP 120K</a:t>
             </a:r>
           </a:p>
         </p:txBody>
@@ -6789,7 +6789,7 @@
                 </a:solidFill>
                 <a:latin typeface="Arial"/>
               </a:rPr>
-              <a:t>(PHP 0.1M)</a:t>
+              <a:t>PHP 144K</a:t>
             </a:r>
           </a:p>
         </p:txBody>
@@ -6868,7 +6868,7 @@
                 </a:solidFill>
                 <a:latin typeface="Arial"/>
               </a:rPr>
-              <a:t>PHP 0.8M</a:t>
+              <a:t>PHP 1.67M</a:t>
             </a:r>
           </a:p>
         </p:txBody>
@@ -6947,7 +6947,7 @@
                 </a:solidFill>
                 <a:latin typeface="Arial"/>
               </a:rPr>
-              <a:t>PHP 5.5M</a:t>
+              <a:t>PHP 7.17M</a:t>
             </a:r>
           </a:p>
         </p:txBody>
@@ -7265,7 +7265,7 @@
                 </a:solidFill>
                 <a:latin typeface="Arial"/>
               </a:rPr>
-              <a:t>Seeking lean pilot support after building the first browser MVP and native wrapper.</a:t>
+              <a:t>No large raise needed: optional micro-budget support for the pilot.</a:t>
             </a:r>
           </a:p>
         </p:txBody>
@@ -7344,7 +7344,7 @@
                 </a:solidFill>
                 <a:latin typeface="Arial"/>
               </a:rPr>
-              <a:t>20%</a:t>
+              <a:t>10%</a:t>
             </a:r>
           </a:p>
         </p:txBody>
@@ -7412,7 +7412,7 @@
                 </a:solidFill>
                 <a:latin typeface="Arial"/>
               </a:rPr>
-              <a:t>PHP 100,000</a:t>
+              <a:t>PHP 5,000</a:t>
             </a:r>
           </a:p>
         </p:txBody>
@@ -7491,7 +7491,7 @@
                 </a:solidFill>
                 <a:latin typeface="Arial"/>
               </a:rPr>
-              <a:t>35%</a:t>
+              <a:t>40%</a:t>
             </a:r>
           </a:p>
         </p:txBody>
@@ -7525,7 +7525,7 @@
                 </a:solidFill>
                 <a:latin typeface="Arial"/>
               </a:rPr>
-              <a:t>Local marketing</a:t>
+              <a:t>Page/content boosts</a:t>
             </a:r>
           </a:p>
         </p:txBody>
@@ -7559,7 +7559,7 @@
                 </a:solidFill>
                 <a:latin typeface="Arial"/>
               </a:rPr>
-              <a:t>PHP 175,000</a:t>
+              <a:t>PHP 20,000</a:t>
             </a:r>
           </a:p>
         </p:txBody>
@@ -7672,7 +7672,7 @@
                 </a:solidFill>
                 <a:latin typeface="Arial"/>
               </a:rPr>
-              <a:t>Operations</a:t>
+              <a:t>Field ops</a:t>
             </a:r>
           </a:p>
         </p:txBody>
@@ -7706,7 +7706,7 @@
                 </a:solidFill>
                 <a:latin typeface="Arial"/>
               </a:rPr>
-              <a:t>PHP 150,000</a:t>
+              <a:t>PHP 15,000</a:t>
             </a:r>
           </a:p>
         </p:txBody>
@@ -7785,7 +7785,7 @@
                 </a:solidFill>
                 <a:latin typeface="Arial"/>
               </a:rPr>
-              <a:t>15%</a:t>
+              <a:t>20%</a:t>
             </a:r>
           </a:p>
         </p:txBody>
@@ -7819,7 +7819,7 @@
                 </a:solidFill>
                 <a:latin typeface="Arial"/>
               </a:rPr>
-              <a:t>Legal/Admin</a:t>
+              <a:t>Admin buffer</a:t>
             </a:r>
           </a:p>
         </p:txBody>
@@ -7853,7 +7853,7 @@
                 </a:solidFill>
                 <a:latin typeface="Arial"/>
               </a:rPr>
-              <a:t>PHP 75,000</a:t>
+              <a:t>PHP 10,000</a:t>
             </a:r>
           </a:p>
         </p:txBody>
@@ -7887,7 +7887,7 @@
                 </a:solidFill>
                 <a:latin typeface="Arial"/>
               </a:rPr>
-              <a:t>Use free resources first; paid spend should support only field validation, page growth, support, and essential app polish.</a:t>
+              <a:t>Use free resources first; this optional PHP 50,000 ceiling covers only small boosts, field validation, and essentials.</a:t>
             </a:r>
           </a:p>
         </p:txBody>
